--- a/examples/EVM1110E_W10/EVM1110E_W10_Supplier_Venue.pptx
+++ b/examples/EVM1110E_W10/EVM1110E_W10_Supplier_Venue.pptx
@@ -530,7 +530,7 @@
           <a:p>
             <a:r>
               <a:rPr lang="en-US" dirty="0"/>
-              <a:t>Slide 1 (dàn ý #1). Phần 3, buổi 2/4. Điền tên giảng viên trước khi dạy.
+              <a:t>Slide 1 (dàn ý #1). Phần 3, buổi 2/4.
 Alt-text: sơ đồ mặt bằng ballroom nhìn từ trên xuống — sân khấu phía trên, các bàn tròn xếp thành hàng.</a:t>
             </a:r>
             <a:endParaRPr lang="en-US" dirty="0"/>
@@ -4130,7 +4130,7 @@
                 <a:ea typeface="Alexandria" pitchFamily="34" charset="-122"/>
                 <a:cs typeface="Alexandria" pitchFamily="34" charset="-120"/>
               </a:rPr>
-              <a:t>Giảng viên: [Tên giảng viên]</a:t>
+              <a:t>Giảng viên: Đoàn Nguyễn Bảo Quyên</a:t>
             </a:r>
             <a:endParaRPr lang="en-US" sz="1500" dirty="0"/>
           </a:p>
